--- a/docs/tech/ezApprovalG/문서유통 설치/문서유통 모듈 가이드_v1.3.pptx
+++ b/docs/tech/ezApprovalG/문서유통 설치/문서유통 모듈 가이드_v1.3.pptx
@@ -285,7 +285,7 @@
           <a:p>
             <a:fld id="{50EEB286-2530-481D-BB2C-E75D99E91DD0}" type="datetimeFigureOut">
               <a:rPr lang="ko-KR" altLang="en-US" smtClean="0"/>
-              <a:t>2021-02-01</a:t>
+              <a:t>2021-06-21</a:t>
             </a:fld>
             <a:endParaRPr lang="ko-KR" altLang="en-US"/>
           </a:p>
@@ -453,7 +453,7 @@
           <a:p>
             <a:fld id="{50EEB286-2530-481D-BB2C-E75D99E91DD0}" type="datetimeFigureOut">
               <a:rPr lang="ko-KR" altLang="en-US" smtClean="0"/>
-              <a:t>2021-02-01</a:t>
+              <a:t>2021-06-21</a:t>
             </a:fld>
             <a:endParaRPr lang="ko-KR" altLang="en-US"/>
           </a:p>
@@ -631,7 +631,7 @@
           <a:p>
             <a:fld id="{50EEB286-2530-481D-BB2C-E75D99E91DD0}" type="datetimeFigureOut">
               <a:rPr lang="ko-KR" altLang="en-US" smtClean="0"/>
-              <a:t>2021-02-01</a:t>
+              <a:t>2021-06-21</a:t>
             </a:fld>
             <a:endParaRPr lang="ko-KR" altLang="en-US"/>
           </a:p>
@@ -799,7 +799,7 @@
           <a:p>
             <a:fld id="{50EEB286-2530-481D-BB2C-E75D99E91DD0}" type="datetimeFigureOut">
               <a:rPr lang="ko-KR" altLang="en-US" smtClean="0"/>
-              <a:t>2021-02-01</a:t>
+              <a:t>2021-06-21</a:t>
             </a:fld>
             <a:endParaRPr lang="ko-KR" altLang="en-US"/>
           </a:p>
@@ -1044,7 +1044,7 @@
           <a:p>
             <a:fld id="{50EEB286-2530-481D-BB2C-E75D99E91DD0}" type="datetimeFigureOut">
               <a:rPr lang="ko-KR" altLang="en-US" smtClean="0"/>
-              <a:t>2021-02-01</a:t>
+              <a:t>2021-06-21</a:t>
             </a:fld>
             <a:endParaRPr lang="ko-KR" altLang="en-US"/>
           </a:p>
@@ -1273,7 +1273,7 @@
           <a:p>
             <a:fld id="{50EEB286-2530-481D-BB2C-E75D99E91DD0}" type="datetimeFigureOut">
               <a:rPr lang="ko-KR" altLang="en-US" smtClean="0"/>
-              <a:t>2021-02-01</a:t>
+              <a:t>2021-06-21</a:t>
             </a:fld>
             <a:endParaRPr lang="ko-KR" altLang="en-US"/>
           </a:p>
@@ -1637,7 +1637,7 @@
           <a:p>
             <a:fld id="{50EEB286-2530-481D-BB2C-E75D99E91DD0}" type="datetimeFigureOut">
               <a:rPr lang="ko-KR" altLang="en-US" smtClean="0"/>
-              <a:t>2021-02-01</a:t>
+              <a:t>2021-06-21</a:t>
             </a:fld>
             <a:endParaRPr lang="ko-KR" altLang="en-US"/>
           </a:p>
@@ -1754,7 +1754,7 @@
           <a:p>
             <a:fld id="{50EEB286-2530-481D-BB2C-E75D99E91DD0}" type="datetimeFigureOut">
               <a:rPr lang="ko-KR" altLang="en-US" smtClean="0"/>
-              <a:t>2021-02-01</a:t>
+              <a:t>2021-06-21</a:t>
             </a:fld>
             <a:endParaRPr lang="ko-KR" altLang="en-US"/>
           </a:p>
@@ -1849,7 +1849,7 @@
           <a:p>
             <a:fld id="{50EEB286-2530-481D-BB2C-E75D99E91DD0}" type="datetimeFigureOut">
               <a:rPr lang="ko-KR" altLang="en-US" smtClean="0"/>
-              <a:t>2021-02-01</a:t>
+              <a:t>2021-06-21</a:t>
             </a:fld>
             <a:endParaRPr lang="ko-KR" altLang="en-US"/>
           </a:p>
@@ -2124,7 +2124,7 @@
           <a:p>
             <a:fld id="{50EEB286-2530-481D-BB2C-E75D99E91DD0}" type="datetimeFigureOut">
               <a:rPr lang="ko-KR" altLang="en-US" smtClean="0"/>
-              <a:t>2021-02-01</a:t>
+              <a:t>2021-06-21</a:t>
             </a:fld>
             <a:endParaRPr lang="ko-KR" altLang="en-US"/>
           </a:p>
@@ -2376,7 +2376,7 @@
           <a:p>
             <a:fld id="{50EEB286-2530-481D-BB2C-E75D99E91DD0}" type="datetimeFigureOut">
               <a:rPr lang="ko-KR" altLang="en-US" smtClean="0"/>
-              <a:t>2021-02-01</a:t>
+              <a:t>2021-06-21</a:t>
             </a:fld>
             <a:endParaRPr lang="ko-KR" altLang="en-US"/>
           </a:p>
@@ -2587,7 +2587,7 @@
           <a:p>
             <a:fld id="{50EEB286-2530-481D-BB2C-E75D99E91DD0}" type="datetimeFigureOut">
               <a:rPr lang="ko-KR" altLang="en-US" smtClean="0"/>
-              <a:t>2021-02-01</a:t>
+              <a:t>2021-06-21</a:t>
             </a:fld>
             <a:endParaRPr lang="ko-KR" altLang="en-US"/>
           </a:p>
@@ -12929,8 +12929,8 @@
         </p:nvSpPr>
         <p:spPr>
           <a:xfrm>
-            <a:off x="0" y="5109805"/>
-            <a:ext cx="2552856" cy="1754326"/>
+            <a:off x="-5417" y="5107944"/>
+            <a:ext cx="2552856" cy="1785104"/>
           </a:xfrm>
           <a:prstGeom prst="rect">
             <a:avLst/>
@@ -12943,7 +12943,7 @@
           <a:lstStyle/>
           <a:p>
             <a:r>
-              <a:rPr lang="en-US" altLang="ko-KR" sz="1200" dirty="0">
+              <a:rPr lang="en-US" altLang="ko-KR" sz="1000" dirty="0">
                 <a:solidFill>
                   <a:srgbClr val="FF0000"/>
                 </a:solidFill>
@@ -12951,126 +12951,200 @@
               <a:t>ACK code : </a:t>
             </a:r>
             <a:r>
-              <a:rPr lang="en-US" altLang="ko-KR" sz="1200" dirty="0"/>
+              <a:rPr lang="en-US" altLang="ko-KR" sz="1000" dirty="0"/>
               <a:t>                           </a:t>
             </a:r>
           </a:p>
           <a:p>
             <a:r>
-              <a:rPr lang="en-US" altLang="ko-KR" sz="1200" dirty="0"/>
+              <a:rPr lang="en-US" altLang="ko-KR" sz="1000" dirty="0"/>
               <a:t>"S" </a:t>
             </a:r>
             <a:r>
-              <a:rPr lang="ko-KR" altLang="en-US" sz="1200" dirty="0"/>
+              <a:rPr lang="ko-KR" altLang="en-US" sz="1000" dirty="0"/>
               <a:t>전송                       </a:t>
             </a:r>
           </a:p>
           <a:p>
             <a:r>
-              <a:rPr lang="en-US" altLang="ko-KR" sz="1200" dirty="0"/>
+              <a:rPr lang="en-US" altLang="ko-KR" sz="1000" dirty="0"/>
               <a:t>“S” </a:t>
             </a:r>
             <a:r>
-              <a:rPr lang="ko-KR" altLang="en-US" sz="1200" dirty="0"/>
+              <a:rPr lang="ko-KR" altLang="en-US" sz="1000" dirty="0"/>
               <a:t>재전송                    </a:t>
             </a:r>
           </a:p>
           <a:p>
             <a:r>
-              <a:rPr lang="en-US" altLang="ko-KR" sz="1200" dirty="0"/>
+              <a:rPr lang="en-US" altLang="ko-KR" sz="1000" dirty="0"/>
               <a:t>“E” </a:t>
             </a:r>
             <a:r>
-              <a:rPr lang="ko-KR" altLang="en-US" sz="1200" dirty="0"/>
+              <a:rPr lang="ko-KR" altLang="en-US" sz="1000" dirty="0"/>
               <a:t>실패                       </a:t>
             </a:r>
           </a:p>
           <a:p>
             <a:r>
-              <a:rPr lang="en-US" altLang="ko-KR" sz="1200" dirty="0"/>
+              <a:rPr lang="en-US" altLang="ko-KR" sz="1000" dirty="0"/>
               <a:t>”V” </a:t>
             </a:r>
             <a:r>
-              <a:rPr lang="ko-KR" altLang="en-US" sz="1200" dirty="0"/>
+              <a:rPr lang="ko-KR" altLang="en-US" sz="1000" dirty="0"/>
               <a:t>도달 </a:t>
             </a:r>
             <a:r>
-              <a:rPr lang="en-US" altLang="ko-KR" sz="1200" dirty="0"/>
+              <a:rPr lang="en-US" altLang="ko-KR" sz="1000" dirty="0"/>
               <a:t>: temp</a:t>
             </a:r>
             <a:r>
-              <a:rPr lang="ko-KR" altLang="en-US" sz="1200" dirty="0"/>
+              <a:rPr lang="ko-KR" altLang="en-US" sz="1000" dirty="0"/>
               <a:t>에 </a:t>
             </a:r>
             <a:r>
-              <a:rPr lang="en-US" altLang="ko-KR" sz="1200" dirty="0"/>
+              <a:rPr lang="en-US" altLang="ko-KR" sz="1000" dirty="0"/>
               <a:t>xml </a:t>
             </a:r>
             <a:r>
-              <a:rPr lang="ko-KR" altLang="en-US" sz="1200" dirty="0"/>
+              <a:rPr lang="ko-KR" altLang="en-US" sz="1000" dirty="0"/>
               <a:t>저장 후    </a:t>
             </a:r>
           </a:p>
           <a:p>
             <a:r>
-              <a:rPr lang="en-US" altLang="ko-KR" sz="1200" dirty="0"/>
+              <a:rPr lang="en-US" altLang="ko-KR" sz="1000" dirty="0"/>
               <a:t>”R” </a:t>
             </a:r>
             <a:r>
-              <a:rPr lang="ko-KR" altLang="en-US" sz="1200" dirty="0"/>
+              <a:rPr lang="ko-KR" altLang="en-US" sz="1000" dirty="0"/>
               <a:t>수신 </a:t>
             </a:r>
             <a:r>
-              <a:rPr lang="en-US" altLang="ko-KR" sz="1200" dirty="0"/>
+              <a:rPr lang="en-US" altLang="ko-KR" sz="1000" dirty="0"/>
               <a:t>: temp - &gt; receive </a:t>
             </a:r>
           </a:p>
           <a:p>
             <a:r>
-              <a:rPr lang="en-US" altLang="ko-KR" sz="1200" dirty="0"/>
+              <a:rPr lang="en-US" altLang="ko-KR" sz="1000" dirty="0"/>
               <a:t>“I” </a:t>
             </a:r>
             <a:r>
-              <a:rPr lang="ko-KR" altLang="en-US" sz="1200" dirty="0"/>
+              <a:rPr lang="ko-KR" altLang="en-US" sz="1000" dirty="0"/>
               <a:t>접수 </a:t>
             </a:r>
             <a:r>
-              <a:rPr lang="en-US" altLang="ko-KR" sz="1200" dirty="0"/>
+              <a:rPr lang="en-US" altLang="ko-KR" sz="1000" dirty="0"/>
               <a:t>: </a:t>
             </a:r>
             <a:r>
-              <a:rPr lang="ko-KR" altLang="en-US" sz="1200" dirty="0"/>
+              <a:rPr lang="ko-KR" altLang="en-US" sz="1000" dirty="0"/>
               <a:t>문서확인 후            </a:t>
             </a:r>
           </a:p>
           <a:p>
             <a:r>
-              <a:rPr lang="en-US" altLang="ko-KR" sz="1200" dirty="0"/>
+              <a:rPr lang="en-US" altLang="ko-KR" sz="1000" dirty="0"/>
               <a:t>"T" </a:t>
             </a:r>
             <a:r>
-              <a:rPr lang="ko-KR" altLang="en-US" sz="1200" dirty="0"/>
+              <a:rPr lang="ko-KR" altLang="en-US" sz="1000" dirty="0"/>
               <a:t>접수 부서 및 접수자 </a:t>
             </a:r>
             <a:r>
-              <a:rPr lang="en-US" altLang="ko-KR" sz="1200" dirty="0"/>
+              <a:rPr lang="en-US" altLang="ko-KR" sz="1000" dirty="0"/>
               <a:t>Update     </a:t>
             </a:r>
           </a:p>
           <a:p>
             <a:r>
-              <a:rPr lang="en-US" altLang="ko-KR" sz="1200" dirty="0"/>
+              <a:rPr lang="en-US" altLang="ko-KR" sz="1000" dirty="0"/>
               <a:t>"T" </a:t>
             </a:r>
             <a:r>
-              <a:rPr lang="ko-KR" altLang="en-US" sz="1200" dirty="0" err="1"/>
+              <a:rPr lang="ko-KR" altLang="en-US" sz="1000" dirty="0" err="1"/>
               <a:t>재발송</a:t>
             </a:r>
             <a:r>
-              <a:rPr lang="ko-KR" altLang="en-US" sz="1200" dirty="0"/>
+              <a:rPr lang="ko-KR" altLang="en-US" sz="1000" dirty="0"/>
               <a:t> 요청 </a:t>
             </a:r>
-            <a:endParaRPr lang="en-US" altLang="ko-KR" sz="1200" dirty="0"/>
+            <a:r>
+              <a:rPr lang="en-US" altLang="ko-KR" sz="1000" dirty="0"/>
+              <a:t>(</a:t>
+            </a:r>
+            <a:r>
+              <a:rPr lang="ko-KR" altLang="en-US" sz="1000" dirty="0"/>
+              <a:t>화면상에는 </a:t>
+            </a:r>
+            <a:r>
+              <a:rPr lang="ko-KR" altLang="en-US" sz="1000" dirty="0" err="1"/>
+              <a:t>재발송</a:t>
+            </a:r>
+            <a:r>
+              <a:rPr lang="ko-KR" altLang="en-US" sz="1000" dirty="0"/>
+              <a:t> 대기</a:t>
+            </a:r>
+            <a:r>
+              <a:rPr lang="en-US" altLang="ko-KR" sz="1000" dirty="0"/>
+              <a:t>)</a:t>
+            </a:r>
+          </a:p>
+          <a:p>
+            <a:r>
+              <a:rPr lang="en-US" altLang="ko-KR" sz="1000">
+                <a:solidFill>
+                  <a:srgbClr val="FF0000"/>
+                </a:solidFill>
+              </a:rPr>
+              <a:t>***return</a:t>
+            </a:r>
+            <a:r>
+              <a:rPr lang="ko-KR" altLang="en-US" sz="1000" dirty="0">
+                <a:solidFill>
+                  <a:srgbClr val="FF0000"/>
+                </a:solidFill>
+              </a:rPr>
+              <a:t>와 </a:t>
+            </a:r>
+            <a:r>
+              <a:rPr lang="en-US" altLang="ko-KR" sz="1000" dirty="0">
+                <a:solidFill>
+                  <a:srgbClr val="FF0000"/>
+                </a:solidFill>
+              </a:rPr>
+              <a:t>req-resend, send </a:t>
+            </a:r>
+            <a:r>
+              <a:rPr lang="ko-KR" altLang="en-US" sz="1000" dirty="0">
+                <a:solidFill>
+                  <a:srgbClr val="FF0000"/>
+                </a:solidFill>
+              </a:rPr>
+              <a:t>와 </a:t>
+            </a:r>
+            <a:r>
+              <a:rPr lang="en-US" altLang="ko-KR" sz="1000" dirty="0">
+                <a:solidFill>
+                  <a:srgbClr val="FF0000"/>
+                </a:solidFill>
+              </a:rPr>
+              <a:t>resend </a:t>
+            </a:r>
+            <a:r>
+              <a:rPr lang="ko-KR" altLang="en-US" sz="1000" dirty="0">
+                <a:solidFill>
+                  <a:srgbClr val="FF0000"/>
+                </a:solidFill>
+              </a:rPr>
+              <a:t>코드 재정의 필요</a:t>
+            </a:r>
+            <a:endParaRPr lang="en-US" altLang="ko-KR" sz="1000" dirty="0">
+              <a:solidFill>
+                <a:srgbClr val="FF0000"/>
+              </a:solidFill>
+            </a:endParaRPr>
           </a:p>
         </p:txBody>
       </p:sp>
